--- a/docs/floor-bias-strategy.pptx
+++ b/docs/floor-bias-strategy.pptx
@@ -2614,6 +2614,10 @@
             <a:prstDash val="solid"/>
           </a:ln>
         </p:spPr>
+        <p:txBody>
+          <a:bodyPr/>
+          <a:p/>
+        </p:txBody>
       </p:sp>
       <p:sp>
         <p:nvSpPr>
@@ -2719,6 +2723,10 @@
             <a:prstDash val="solid"/>
           </a:ln>
         </p:spPr>
+        <p:txBody>
+          <a:bodyPr/>
+          <a:p/>
+        </p:txBody>
       </p:sp>
       <p:sp>
         <p:nvSpPr>
@@ -2753,7 +2761,7 @@
                 <a:ea typeface="Bookman Old Style" pitchFamily="34" charset="-122"/>
                 <a:cs typeface="Bookman Old Style" pitchFamily="34" charset="-120"/>
               </a:rPr>
-              <a:t>56.8%</a:t>
+              <a:t>64.5%</a:t>
             </a:r>
             <a:endParaRPr lang="en-US" sz="2400" dirty="0"/>
           </a:p>
@@ -2792,7 +2800,7 @@
                 <a:ea typeface="Calibri" pitchFamily="34" charset="-122"/>
                 <a:cs typeface="Calibri" pitchFamily="34" charset="-120"/>
               </a:rPr>
-              <a:t>won overall, 681 bets</a:t>
+              <a:t>won overall, 234 bets</a:t>
             </a:r>
             <a:endParaRPr lang="en-US" sz="1200" dirty="0"/>
           </a:p>
@@ -2824,6 +2832,10 @@
             <a:prstDash val="solid"/>
           </a:ln>
         </p:spPr>
+        <p:txBody>
+          <a:bodyPr/>
+          <a:p/>
+        </p:txBody>
       </p:sp>
       <p:sp>
         <p:nvSpPr>
@@ -3063,6 +3075,10 @@
             <a:prstDash val="solid"/>
           </a:ln>
         </p:spPr>
+        <p:txBody>
+          <a:bodyPr/>
+          <a:p/>
+        </p:txBody>
       </p:sp>
       <p:sp>
         <p:nvSpPr>
@@ -3100,7 +3116,7 @@
                 <a:ea typeface="Calibri" pitchFamily="34" charset="-122"/>
                 <a:cs typeface="Calibri" pitchFamily="34" charset="-120"/>
               </a:rPr>
-              <a:t>A “unit” is one standard bet.  </a:t>
+              <a:t>A “unit” is one standard bet.  If a unit is $100, the blue line finished about +$5,800 across ten seasons and 681 bets — under the original research filter. Today's tighter rule kept about +$5,400 of that on a third of the bets.</a:t>
             </a:r>
             <a:pPr indent="0" marL="0">
               <a:lnSpc>
@@ -3117,7 +3133,7 @@
                 <a:ea typeface="Calibri" pitchFamily="34" charset="-122"/>
                 <a:cs typeface="Calibri" pitchFamily="34" charset="-120"/>
               </a:rPr>
-              <a:t>If a unit is $100, the blue line finished about +$5,800 across ten seasons and 681 bets.</a:t>
+              <a:t/>
             </a:r>
             <a:endParaRPr lang="en-US" sz="1200" dirty="0"/>
           </a:p>
@@ -3149,6 +3165,10 @@
             <a:prstDash val="solid"/>
           </a:ln>
         </p:spPr>
+        <p:txBody>
+          <a:bodyPr/>
+          <a:p/>
+        </p:txBody>
       </p:sp>
       <p:sp>
         <p:nvSpPr>
@@ -3345,6 +3365,10 @@
             <a:prstDash val="solid"/>
           </a:ln>
         </p:spPr>
+        <p:txBody>
+          <a:bodyPr/>
+          <a:p/>
+        </p:txBody>
       </p:sp>
       <p:sp>
         <p:nvSpPr>
@@ -3379,7 +3403,7 @@
                 <a:ea typeface="Bookman Old Style" pitchFamily="34" charset="-122"/>
                 <a:cs typeface="Bookman Old Style" pitchFamily="34" charset="-120"/>
               </a:rPr>
-              <a:t>The rule of thumb:   </a:t>
+              <a:t>The rule of thumb:   ( total − spread ) ÷ 2   is about 7.5 or less</a:t>
             </a:r>
             <a:pPr indent="0" marL="0">
               <a:buNone/>
@@ -3393,7 +3417,7 @@
                 <a:ea typeface="Bookman Old Style" pitchFamily="34" charset="-122"/>
                 <a:cs typeface="Bookman Old Style" pitchFamily="34" charset="-120"/>
               </a:rPr>
-              <a:t>( total − spread ) ÷ 2   is about 10 or less</a:t>
+              <a:t/>
             </a:r>
             <a:endParaRPr lang="en-US" sz="2100" dirty="0"/>
           </a:p>
@@ -3432,7 +3456,7 @@
                 <a:ea typeface="Calibri" pitchFamily="34" charset="-122"/>
                 <a:cs typeface="Calibri" pitchFamily="34" charset="-120"/>
               </a:rPr>
-              <a:t>That arithmetic estimates the underdog's expected points. When it lands near 10 or below, the floor effect is big enough to bet.</a:t>
+              <a:t>That arithmetic estimates the underdog's expected points. When it lands near 7 or below, the floor effect is big enough to bet.</a:t>
             </a:r>
             <a:endParaRPr lang="en-US" sz="1400" dirty="0"/>
           </a:p>
@@ -3620,6 +3644,10 @@
             <a:prstDash val="solid"/>
           </a:ln>
         </p:spPr>
+        <p:txBody>
+          <a:bodyPr/>
+          <a:p/>
+        </p:txBody>
       </p:sp>
       <p:sp>
         <p:nvSpPr>
@@ -3803,6 +3831,10 @@
             <a:prstDash val="solid"/>
           </a:ln>
         </p:spPr>
+        <p:txBody>
+          <a:bodyPr/>
+          <a:p/>
+        </p:txBody>
       </p:sp>
       <p:sp>
         <p:nvSpPr>
@@ -3986,6 +4018,10 @@
             <a:prstDash val="solid"/>
           </a:ln>
         </p:spPr>
+        <p:txBody>
+          <a:bodyPr/>
+          <a:p/>
+        </p:txBody>
       </p:sp>
       <p:sp>
         <p:nvSpPr>
@@ -4169,6 +4205,10 @@
             <a:prstDash val="solid"/>
           </a:ln>
         </p:spPr>
+        <p:txBody>
+          <a:bodyPr/>
+          <a:p/>
+        </p:txBody>
       </p:sp>
       <p:sp>
         <p:nvSpPr>
@@ -4320,7 +4360,7 @@
                 <a:ea typeface="Bookman Old Style" pitchFamily="34" charset="-122"/>
                 <a:cs typeface="Bookman Old Style" pitchFamily="34" charset="-120"/>
               </a:rPr>
-              <a:t>BET the over</a:t>
+              <a:t>Skip — no edge</a:t>
             </a:r>
             <a:endParaRPr lang="en-US" sz="1400" dirty="0"/>
           </a:p>
@@ -4352,6 +4392,10 @@
             <a:prstDash val="solid"/>
           </a:ln>
         </p:spPr>
+        <p:txBody>
+          <a:bodyPr/>
+          <a:p/>
+        </p:txBody>
       </p:sp>
       <p:sp>
         <p:nvSpPr>
@@ -4503,7 +4547,7 @@
                 <a:ea typeface="Bookman Old Style" pitchFamily="34" charset="-122"/>
                 <a:cs typeface="Bookman Old Style" pitchFamily="34" charset="-120"/>
               </a:rPr>
-              <a:t>BET the over</a:t>
+              <a:t>Skip — no edge</a:t>
             </a:r>
             <a:endParaRPr lang="en-US" sz="1400" dirty="0"/>
           </a:p>
@@ -4535,6 +4579,10 @@
             <a:prstDash val="solid"/>
           </a:ln>
         </p:spPr>
+        <p:txBody>
+          <a:bodyPr/>
+          <a:p/>
+        </p:txBody>
       </p:sp>
       <p:sp>
         <p:nvSpPr>
@@ -4686,7 +4734,7 @@
                 <a:ea typeface="Bookman Old Style" pitchFamily="34" charset="-122"/>
                 <a:cs typeface="Bookman Old Style" pitchFamily="34" charset="-120"/>
               </a:rPr>
-              <a:t>STRONG bet</a:t>
+              <a:t>BET the over</a:t>
             </a:r>
             <a:endParaRPr lang="en-US" sz="1400" dirty="0"/>
           </a:p>
@@ -4725,7 +4773,7 @@
                 <a:ea typeface="Calibri" pitchFamily="34" charset="-122"/>
                 <a:cs typeface="Calibri" pitchFamily="34" charset="-120"/>
               </a:rPr>
-              <a:t>About 5% of games qualify — roughly 70–110 bets a season.</a:t>
+              <a:t>About 2% of games qualify — roughly 30–50 bets a season.</a:t>
             </a:r>
             <a:endParaRPr lang="en-US" sz="1300" dirty="0"/>
           </a:p>
@@ -4867,6 +4915,10 @@
             <a:prstDash val="solid"/>
           </a:ln>
         </p:spPr>
+        <p:txBody>
+          <a:bodyPr/>
+          <a:p/>
+        </p:txBody>
       </p:sp>
       <p:sp>
         <p:nvSpPr>
@@ -4892,6 +4944,10 @@
             <a:prstDash val="solid"/>
           </a:ln>
         </p:spPr>
+        <p:txBody>
+          <a:bodyPr/>
+          <a:p/>
+        </p:txBody>
       </p:sp>
       <p:sp>
         <p:nvSpPr>
@@ -5007,7 +5063,7 @@
                 <a:ea typeface="Calibri" pitchFamily="34" charset="-122"/>
                 <a:cs typeface="Calibri" pitchFamily="34" charset="-120"/>
               </a:rPr>
-              <a:t>Underdog expected points around 10 or below. Nothing else qualifies.</a:t>
+              <a:t>Underdog expected points around 7 or below. Nothing else qualifies.</a:t>
             </a:r>
             <a:endParaRPr lang="en-US" sz="1200" dirty="0"/>
           </a:p>
@@ -5039,6 +5095,10 @@
             <a:prstDash val="solid"/>
           </a:ln>
         </p:spPr>
+        <p:txBody>
+          <a:bodyPr/>
+          <a:p/>
+        </p:txBody>
       </p:sp>
       <p:sp>
         <p:nvSpPr>
@@ -5064,6 +5124,10 @@
             <a:prstDash val="solid"/>
           </a:ln>
         </p:spPr>
+        <p:txBody>
+          <a:bodyPr/>
+          <a:p/>
+        </p:txBody>
       </p:sp>
       <p:sp>
         <p:nvSpPr>
@@ -5211,6 +5275,10 @@
             <a:prstDash val="solid"/>
           </a:ln>
         </p:spPr>
+        <p:txBody>
+          <a:bodyPr/>
+          <a:p/>
+        </p:txBody>
       </p:sp>
       <p:sp>
         <p:nvSpPr>
@@ -5236,6 +5304,10 @@
             <a:prstDash val="solid"/>
           </a:ln>
         </p:spPr>
+        <p:txBody>
+          <a:bodyPr/>
+          <a:p/>
+        </p:txBody>
       </p:sp>
       <p:sp>
         <p:nvSpPr>
@@ -5351,7 +5423,7 @@
                 <a:ea typeface="Calibri" pitchFamily="34" charset="-122"/>
                 <a:cs typeface="Calibri" pitchFamily="34" charset="-120"/>
               </a:rPr>
-              <a:t>Take −110 or better. Worse pricing eats most of the edge — this filter is not optional.</a:t>
+              <a:t>Take −120 or better, never worse than −125. Bad pricing eats the edge — not optional.</a:t>
             </a:r>
             <a:endParaRPr lang="en-US" sz="1200" dirty="0"/>
           </a:p>
@@ -5383,6 +5455,10 @@
             <a:prstDash val="solid"/>
           </a:ln>
         </p:spPr>
+        <p:txBody>
+          <a:bodyPr/>
+          <a:p/>
+        </p:txBody>
       </p:sp>
       <p:sp>
         <p:nvSpPr>
@@ -5408,6 +5484,10 @@
             <a:prstDash val="solid"/>
           </a:ln>
         </p:spPr>
+        <p:txBody>
+          <a:bodyPr/>
+          <a:p/>
+        </p:txBody>
       </p:sp>
       <p:sp>
         <p:nvSpPr>
@@ -5555,6 +5635,10 @@
             <a:prstDash val="solid"/>
           </a:ln>
         </p:spPr>
+        <p:txBody>
+          <a:bodyPr/>
+          <a:p/>
+        </p:txBody>
       </p:sp>
       <p:sp>
         <p:nvSpPr>
@@ -5580,6 +5664,10 @@
             <a:prstDash val="solid"/>
           </a:ln>
         </p:spPr>
+        <p:txBody>
+          <a:bodyPr/>
+          <a:p/>
+        </p:txBody>
       </p:sp>
       <p:sp>
         <p:nvSpPr>
@@ -5727,6 +5815,10 @@
             <a:prstDash val="solid"/>
           </a:ln>
         </p:spPr>
+        <p:txBody>
+          <a:bodyPr/>
+          <a:p/>
+        </p:txBody>
       </p:sp>
       <p:sp>
         <p:nvSpPr>
@@ -5752,6 +5844,10 @@
             <a:prstDash val="solid"/>
           </a:ln>
         </p:spPr>
+        <p:txBody>
+          <a:bodyPr/>
+          <a:p/>
+        </p:txBody>
       </p:sp>
       <p:sp>
         <p:nvSpPr>
@@ -6009,6 +6105,10 @@
             <a:prstDash val="solid"/>
           </a:ln>
         </p:spPr>
+        <p:txBody>
+          <a:bodyPr/>
+          <a:p/>
+        </p:txBody>
       </p:sp>
       <p:sp>
         <p:nvSpPr>
@@ -6034,6 +6134,10 @@
             <a:prstDash val="solid"/>
           </a:ln>
         </p:spPr>
+        <p:txBody>
+          <a:bodyPr/>
+          <a:p/>
+        </p:txBody>
       </p:sp>
       <p:sp>
         <p:nvSpPr>
@@ -6149,7 +6253,7 @@
                 <a:ea typeface="Calibri" pitchFamily="34" charset="-122"/>
                 <a:cs typeface="Calibri" pitchFamily="34" charset="-120"/>
               </a:rPr>
-              <a:t>Roughly one season in five loses money even if the edge is completely real. One test season lost 8%. That is the model working as expected, not breaking.</a:t>
+              <a:t>Even a fully real edge loses money in roughly 1 season in 5 at worst. One test season lost 8%. That is the model working as expected, not breaking.</a:t>
             </a:r>
             <a:endParaRPr lang="en-US" sz="1250" dirty="0"/>
           </a:p>
@@ -6181,6 +6285,10 @@
             <a:prstDash val="solid"/>
           </a:ln>
         </p:spPr>
+        <p:txBody>
+          <a:bodyPr/>
+          <a:p/>
+        </p:txBody>
       </p:sp>
       <p:sp>
         <p:nvSpPr>
@@ -6206,6 +6314,10 @@
             <a:prstDash val="solid"/>
           </a:ln>
         </p:spPr>
+        <p:txBody>
+          <a:bodyPr/>
+          <a:p/>
+        </p:txBody>
       </p:sp>
       <p:sp>
         <p:nvSpPr>
@@ -6321,7 +6433,7 @@
                 <a:ea typeface="Calibri" pitchFamily="34" charset="-122"/>
                 <a:cs typeface="Calibri" pitchFamily="34" charset="-120"/>
               </a:rPr>
-              <a:t>It wins about 57% instead of 52.4%. Over ~80 bets a season, luck easily swamps that gap in any single year.</a:t>
+              <a:t>It wins about 64% (plan on 58%). Over 30–50 bets a season, luck easily swamps that gap in any single year.</a:t>
             </a:r>
             <a:endParaRPr lang="en-US" sz="1250" dirty="0"/>
           </a:p>
@@ -6353,6 +6465,10 @@
             <a:prstDash val="solid"/>
           </a:ln>
         </p:spPr>
+        <p:txBody>
+          <a:bodyPr/>
+          <a:p/>
+        </p:txBody>
       </p:sp>
       <p:sp>
         <p:nvSpPr>
@@ -6378,6 +6494,10 @@
             <a:prstDash val="solid"/>
           </a:ln>
         </p:spPr>
+        <p:txBody>
+          <a:bodyPr/>
+          <a:p/>
+        </p:txBody>
       </p:sp>
       <p:sp>
         <p:nvSpPr>
@@ -6525,6 +6645,10 @@
             <a:prstDash val="solid"/>
           </a:ln>
         </p:spPr>
+        <p:txBody>
+          <a:bodyPr/>
+          <a:p/>
+        </p:txBody>
       </p:sp>
       <p:sp>
         <p:nvSpPr>
@@ -6550,6 +6674,10 @@
             <a:prstDash val="solid"/>
           </a:ln>
         </p:spPr>
+        <p:txBody>
+          <a:bodyPr/>
+          <a:p/>
+        </p:txBody>
       </p:sp>
       <p:sp>
         <p:nvSpPr>
@@ -6846,6 +6974,10 @@
             <a:prstDash val="solid"/>
           </a:ln>
         </p:spPr>
+        <p:txBody>
+          <a:bodyPr/>
+          <a:p/>
+        </p:txBody>
       </p:sp>
       <p:sp>
         <p:nvSpPr>
@@ -6996,6 +7128,10 @@
             <a:prstDash val="solid"/>
           </a:ln>
         </p:spPr>
+        <p:txBody>
+          <a:bodyPr/>
+          <a:p/>
+        </p:txBody>
       </p:sp>
       <p:sp>
         <p:nvSpPr>
@@ -7114,7 +7250,7 @@
                 <a:ea typeface="Calibri" pitchFamily="34" charset="-122"/>
                 <a:cs typeface="Calibri" pitchFamily="34" charset="-120"/>
               </a:rPr>
-              <a:t>This rests on 681 real bets. That's enough to be meaningfully better than chance, but not enough to pin down the exact size of the edge. The true long-run number could be noticeably better or worse than 57%.</a:t>
+              <a:t>This rests on 234 real bets. That's enough to be meaningfully better than chance, but not enough to pin down the exact size of the edge. The true long-run number could be noticeably better or worse than 64.5% — plan on 58%.</a:t>
             </a:r>
             <a:endParaRPr lang="en-US" sz="1250" dirty="0"/>
           </a:p>
@@ -7146,6 +7282,10 @@
             <a:prstDash val="solid"/>
           </a:ln>
         </p:spPr>
+        <p:txBody>
+          <a:bodyPr/>
+          <a:p/>
+        </p:txBody>
       </p:sp>
       <p:sp>
         <p:nvSpPr>
@@ -7301,6 +7441,10 @@
             <a:prstDash val="solid"/>
           </a:ln>
         </p:spPr>
+        <p:txBody>
+          <a:bodyPr/>
+          <a:p/>
+        </p:txBody>
       </p:sp>
       <p:sp>
         <p:nvSpPr>
@@ -7407,6 +7551,10 @@
             <a:prstDash val="solid"/>
           </a:ln>
         </p:spPr>
+        <p:txBody>
+          <a:bodyPr/>
+          <a:p/>
+        </p:txBody>
       </p:sp>
       <p:sp>
         <p:nvSpPr>
@@ -7483,7 +7631,7 @@
                 <a:ea typeface="Calibri" pitchFamily="34" charset="-122"/>
                 <a:cs typeface="Calibri" pitchFamily="34" charset="-120"/>
               </a:rPr>
-              <a:t>Betting the over in exactly those games won about 57% of the time over ten seasons of blind testing — against a 52.4% breakeven.</a:t>
+              <a:t>Betting the over in exactly those games won about 64% of the time over ten seasons of blind testing — against a 52.4% breakeven.</a:t>
             </a:r>
             <a:endParaRPr lang="en-US" sz="1600" dirty="0"/>
           </a:p>
@@ -7513,6 +7661,10 @@
             <a:prstDash val="solid"/>
           </a:ln>
         </p:spPr>
+        <p:txBody>
+          <a:bodyPr/>
+          <a:p/>
+        </p:txBody>
       </p:sp>
       <p:sp>
         <p:nvSpPr>
@@ -7589,7 +7741,7 @@
                 <a:ea typeface="Calibri" pitchFamily="34" charset="-122"/>
                 <a:cs typeface="Calibri" pitchFamily="34" charset="-120"/>
               </a:rPr>
-              <a:t>It's a small, slow, volatile edge on roughly 80 obscure games a year. Not a money printer.</a:t>
+              <a:t>It's a small, slow, volatile edge on roughly 30–50 obscure games a year. Not a money printer.</a:t>
             </a:r>
             <a:endParaRPr lang="en-US" sz="1600" dirty="0"/>
           </a:p>
@@ -7621,6 +7773,10 @@
             <a:prstDash val="solid"/>
           </a:ln>
         </p:spPr>
+        <p:txBody>
+          <a:bodyPr/>
+          <a:p/>
+        </p:txBody>
       </p:sp>
       <p:sp>
         <p:nvSpPr>
@@ -7807,6 +7963,10 @@
             </a:outerShdw>
           </a:effectLst>
         </p:spPr>
+        <p:txBody>
+          <a:bodyPr/>
+          <a:p/>
+        </p:txBody>
       </p:sp>
       <p:sp>
         <p:nvSpPr>
@@ -7917,7 +8077,7 @@
                 <a:ea typeface="Bookman Old Style" pitchFamily="34" charset="-122"/>
                 <a:cs typeface="Bookman Old Style" pitchFamily="34" charset="-120"/>
               </a:rPr>
-              <a:t>57%</a:t>
+              <a:t>64.5%</a:t>
             </a:r>
             <a:endParaRPr lang="en-US" sz="4600" dirty="0"/>
           </a:p>
@@ -8034,7 +8194,7 @@
                 <a:ea typeface="Bookman Old Style" pitchFamily="34" charset="-122"/>
                 <a:cs typeface="Bookman Old Style" pitchFamily="34" charset="-120"/>
               </a:rPr>
-              <a:t>~80</a:t>
+              <a:t>30–50</a:t>
             </a:r>
             <a:endParaRPr lang="en-US" sz="4600" dirty="0"/>
           </a:p>
@@ -8112,7 +8272,7 @@
                 <a:ea typeface="Calibri" pitchFamily="34" charset="-122"/>
                 <a:cs typeface="Calibri" pitchFamily="34" charset="-120"/>
               </a:rPr>
-              <a:t>about 5% of all games</a:t>
+              <a:t>about 2% of all games</a:t>
             </a:r>
             <a:endParaRPr lang="en-US" sz="1200" dirty="0"/>
           </a:p>
@@ -9717,6 +9877,10 @@
             <a:prstDash val="solid"/>
           </a:ln>
         </p:spPr>
+        <p:txBody>
+          <a:bodyPr/>
+          <a:p/>
+        </p:txBody>
       </p:sp>
       <p:sp>
         <p:nvSpPr>
@@ -9861,6 +10025,10 @@
             <a:prstDash val="solid"/>
           </a:ln>
         </p:spPr>
+        <p:txBody>
+          <a:bodyPr/>
+          <a:p/>
+        </p:txBody>
       </p:sp>
       <p:sp>
         <p:nvSpPr>
@@ -10005,6 +10173,10 @@
             <a:prstDash val="solid"/>
           </a:ln>
         </p:spPr>
+        <p:txBody>
+          <a:bodyPr/>
+          <a:p/>
+        </p:txBody>
       </p:sp>
       <p:sp>
         <p:nvSpPr>
@@ -10082,7 +10254,7 @@
                 <a:cs typeface="Calibri" pitchFamily="34" charset="-120"/>
               </a:rPr>
               <a:t>is “breakeven” — the win rate where you make exactly nothing.
-</a:t>
+Anything below it and the house fee grinds you down. This is why beating a coin flip isn't enough, and why the 64% you'll see later matters.</a:t>
             </a:r>
             <a:pPr indent="0" marL="0">
               <a:lnSpc>
@@ -10099,7 +10271,7 @@
                 <a:ea typeface="Calibri" pitchFamily="34" charset="-122"/>
                 <a:cs typeface="Calibri" pitchFamily="34" charset="-120"/>
               </a:rPr>
-              <a:t>Anything below it and the house fee grinds you down. This is why beating a coin flip isn't enough, and why 57% is a meaningful number.</a:t>
+              <a:t/>
             </a:r>
             <a:endParaRPr lang="en-US" sz="1450" dirty="0"/>
           </a:p>
